--- a/api-create.pptx
+++ b/api-create.pptx
@@ -55,6 +55,8 @@
     <p:sldId id="446" r:id="rId50"/>
     <p:sldId id="448" r:id="rId51"/>
     <p:sldId id="449" r:id="rId52"/>
+    <p:sldId id="450" r:id="rId53"/>
+    <p:sldId id="451" r:id="rId54"/>
   </p:sldIdLst>
   <p:sldSz cx="12192000" cy="6858000"/>
   <p:notesSz cx="6858000" cy="9144000"/>
@@ -8985,6 +8987,155 @@
 </p:sld>
 </file>
 
+<file path=ppt/slides/slide51.xml><?xml version="1.0" encoding="utf-8"?>
+<p:sld xmlns:a="http://schemas.openxmlformats.org/drawingml/2006/main" xmlns:r="http://schemas.openxmlformats.org/officeDocument/2006/relationships" xmlns:p="http://schemas.openxmlformats.org/presentationml/2006/main">
+  <p:cSld>
+    <p:bg>
+      <p:bgPr>
+        <a:solidFill>
+          <a:schemeClr val="accent2">
+            <a:lumMod val="60000"/>
+            <a:lumOff val="40000"/>
+          </a:schemeClr>
+        </a:solidFill>
+        <a:effectLst/>
+      </p:bgPr>
+    </p:bg>
+    <p:spTree>
+      <p:nvGrpSpPr>
+        <p:cNvPr id="1" name=""/>
+        <p:cNvGrpSpPr/>
+        <p:nvPr/>
+      </p:nvGrpSpPr>
+      <p:grpSpPr/>
+      <p:sp>
+        <p:nvSpPr>
+          <p:cNvPr id="2" name="Text Box 1"/>
+          <p:cNvSpPr txBox="1"/>
+          <p:nvPr/>
+        </p:nvSpPr>
+        <p:spPr>
+          <a:xfrm>
+            <a:off x="3506470" y="3075305"/>
+            <a:ext cx="5179060" cy="706755"/>
+          </a:xfrm>
+          <a:prstGeom prst="rect">
+            <a:avLst/>
+          </a:prstGeom>
+          <a:noFill/>
+        </p:spPr>
+        <p:txBody>
+          <a:bodyPr wrap="none" rtlCol="0">
+            <a:spAutoFit/>
+          </a:bodyPr>
+          <a:p>
+            <a:pPr algn="ctr"/>
+            <a:r>
+              <a:rPr lang="" altLang="en-US" sz="2000" b="1"/>
+              <a:t>Laravel Documentation</a:t>
+            </a:r>
+            <a:endParaRPr lang="en-US" altLang="en-US" sz="2000" b="1"/>
+          </a:p>
+          <a:p>
+            <a:pPr algn="ctr"/>
+            <a:r>
+              <a:rPr lang="en-US" altLang="en-US" sz="2000" b="1"/>
+              <a:t>https://scribe.knuckles.wtf/laravel/</a:t>
+            </a:r>
+            <a:endParaRPr lang="en-US" altLang="en-US" sz="2000" b="1"/>
+          </a:p>
+        </p:txBody>
+      </p:sp>
+    </p:spTree>
+  </p:cSld>
+  <p:clrMapOvr>
+    <a:masterClrMapping/>
+  </p:clrMapOvr>
+</p:sld>
+</file>
+
+<file path=ppt/slides/slide52.xml><?xml version="1.0" encoding="utf-8"?>
+<p:sld xmlns:a="http://schemas.openxmlformats.org/drawingml/2006/main" xmlns:r="http://schemas.openxmlformats.org/officeDocument/2006/relationships" xmlns:p="http://schemas.openxmlformats.org/presentationml/2006/main">
+  <p:cSld>
+    <p:spTree>
+      <p:nvGrpSpPr>
+        <p:cNvPr id="1" name=""/>
+        <p:cNvGrpSpPr/>
+        <p:nvPr/>
+      </p:nvGrpSpPr>
+      <p:grpSpPr/>
+      <p:sp>
+        <p:nvSpPr>
+          <p:cNvPr id="2" name="Text Box 1"/>
+          <p:cNvSpPr txBox="1"/>
+          <p:nvPr/>
+        </p:nvSpPr>
+        <p:spPr>
+          <a:xfrm>
+            <a:off x="240665" y="175895"/>
+            <a:ext cx="7477125" cy="645160"/>
+          </a:xfrm>
+          <a:prstGeom prst="rect">
+            <a:avLst/>
+          </a:prstGeom>
+          <a:noFill/>
+        </p:spPr>
+        <p:txBody>
+          <a:bodyPr wrap="square" rtlCol="0" anchor="t">
+            <a:spAutoFit/>
+          </a:bodyPr>
+          <a:p>
+            <a:r>
+              <a:rPr lang="" altLang="en-US"/>
+              <a:t>-&gt; </a:t>
+            </a:r>
+            <a:r>
+              <a:rPr lang="en-US"/>
+              <a:t>composer require knuckleswtf/scribe --dev</a:t>
+            </a:r>
+            <a:endParaRPr lang="en-US"/>
+          </a:p>
+          <a:p>
+            <a:r>
+              <a:rPr lang="" altLang="en-US"/>
+              <a:t>check other commad in scribe webise</a:t>
+            </a:r>
+            <a:endParaRPr lang="" altLang="en-US"/>
+          </a:p>
+        </p:txBody>
+      </p:sp>
+      <p:pic>
+        <p:nvPicPr>
+          <p:cNvPr id="3" name="Picture 2"/>
+          <p:cNvPicPr>
+            <a:picLocks noChangeAspect="1"/>
+          </p:cNvPicPr>
+          <p:nvPr/>
+        </p:nvPicPr>
+        <p:blipFill>
+          <a:blip r:embed="rId1"/>
+          <a:stretch>
+            <a:fillRect/>
+          </a:stretch>
+        </p:blipFill>
+        <p:spPr>
+          <a:xfrm>
+            <a:off x="350520" y="1095375"/>
+            <a:ext cx="10904855" cy="5502275"/>
+          </a:xfrm>
+          <a:prstGeom prst="rect">
+            <a:avLst/>
+          </a:prstGeom>
+        </p:spPr>
+      </p:pic>
+    </p:spTree>
+  </p:cSld>
+  <p:clrMapOvr>
+    <a:masterClrMapping/>
+  </p:clrMapOvr>
+</p:sld>
+</file>
+
 <file path=ppt/slides/slide6.xml><?xml version="1.0" encoding="utf-8"?>
 <p:sld xmlns:a="http://schemas.openxmlformats.org/drawingml/2006/main" xmlns:r="http://schemas.openxmlformats.org/officeDocument/2006/relationships" xmlns:p="http://schemas.openxmlformats.org/presentationml/2006/main">
   <p:cSld>
